--- a/public/fun/pack/pptx/familypro/가족소개프리미엄_20_반려동물과함께_피스타치오크림.pptx
+++ b/public/fun/pack/pptx/familypro/가족소개프리미엄_20_반려동물과함께_피스타치오크림.pptx
@@ -113,12 +113,12 @@
   <p:extLst>
     <p:ext uri="{521415D9-36F7-43E2-AB2F-B90AF26B5E84}">
       <p14:sectionLst xmlns:p14="http://schemas.microsoft.com/office/powerpoint/2010/main">
-        <p14:section name="시작" id="{B92C2480-AEA9-4037-8AD4-0D2DE64B88F7}">
+        <p14:section name="시작" id="{A6981A58-B73C-479A-8753-A2C62BE28A83}">
           <p14:sldIdLst>
             <p14:sldId id="256"/>
           </p14:sldIdLst>
         </p14:section>
-        <p14:section name="본문" id="{27F399FD-1515-4579-BE3B-4BD837464D24}">
+        <p14:section name="본문" id="{CCC3C0E7-BFCA-4912-B82F-5B6C321EE274}">
           <p14:sldIdLst>
             <p14:sldId id="257"/>
             <p14:sldId id="258"/>
@@ -127,7 +127,7 @@
             <p14:sldId id="261"/>
           </p14:sldIdLst>
         </p14:section>
-        <p14:section name="마무리" id="{BF33741A-6F97-4938-AB1D-80FF514ED50D}">
+        <p14:section name="마무리" id="{2A090542-0AC9-4D42-9F11-41131BD22E7F}">
           <p14:sldIdLst>
             <p14:sldId id="262"/>
           </p14:sldIdLst>
@@ -1568,7 +1568,7 @@
             </a:lvl1pPr>
           </a:lstStyle>
           <a:p>
-            <a:fld id="{F50FE429-BA04-4BBC-82E2-05AD32D46136}" type="slidenum">
+            <a:fld id="{67E2C13D-5962-453E-AB14-8893813CA2F2}" type="slidenum">
               <a:rPr lang="en-US"/>
               <a:t>‹#›</a:t>
             </a:fld>
@@ -2338,7 +2338,7 @@
             </a:lvl1pPr>
           </a:lstStyle>
           <a:p>
-            <a:fld id="{88E7558A-AF6A-439F-A930-DDD35400ED7A}" type="slidenum">
+            <a:fld id="{4DDBC7DD-7134-495D-9951-B58BAAE5AC67}" type="slidenum">
               <a:rPr lang="en-US"/>
               <a:t>‹#›</a:t>
             </a:fld>
@@ -3087,7 +3087,7 @@
             </a:lvl1pPr>
           </a:lstStyle>
           <a:p>
-            <a:fld id="{D2B2AB55-F716-4ADA-A2A3-C9A8B1A2A9C4}" type="slidenum">
+            <a:fld id="{E1E5D266-F516-44A8-B300-00C3A637A026}" type="slidenum">
               <a:rPr lang="en-US"/>
               <a:t>‹#›</a:t>
             </a:fld>
@@ -3950,7 +3950,7 @@
           <a:p>
             <a:r>
               <a:rPr lang="ko-KR"/>
-              <a:t>소나기 그치고 물웅덩이로 달려가던 모습</a:t>
+              <a:t>물웅덩이로 달려가던 모습</a:t>
             </a:r>
           </a:p>
         </p:txBody>
@@ -3972,7 +3972,7 @@
           <a:p>
             <a:r>
               <a:rPr lang="ko-KR"/>
-              <a:t>반려동물과 함께 · 0000. 00. 00</a:t>
+              <a:t>반려동물과 함께 · 날짜 입력</a:t>
             </a:r>
           </a:p>
         </p:txBody>
@@ -4286,7 +4286,7 @@
           <a:bodyPr/>
           <a:lstStyle/>
           <a:p>
-            <a:fld id="{835D64B8-0D29-4C79-A2CF-E9F41DA4E8B9}" type="slidenum">
+            <a:fld id="{950C6ACF-64FF-4532-8EE6-077CE581B3B8}" type="slidenum">
               <a:rPr lang="en-US"/>
               <a:t>‹#›</a:t>
             </a:fld>
@@ -4867,7 +4867,7 @@
           <a:bodyPr/>
           <a:lstStyle/>
           <a:p>
-            <a:fld id="{F0DA5817-D8C0-47C4-AF0A-6737EE97A06F}" type="slidenum">
+            <a:fld id="{84EF4D2B-6180-4B3D-85A6-A32BCBD8723E}" type="slidenum">
               <a:rPr lang="en-US"/>
               <a:t>‹#›</a:t>
             </a:fld>
@@ -5864,7 +5864,7 @@
           <a:bodyPr/>
           <a:lstStyle/>
           <a:p>
-            <a:fld id="{C1635DBF-DEFA-4B34-BC2E-D976F119836A}" type="slidenum">
+            <a:fld id="{2462F0EB-89E1-486D-8825-E965C196BE77}" type="slidenum">
               <a:rPr lang="en-US"/>
               <a:t>‹#›</a:t>
             </a:fld>
@@ -7150,7 +7150,7 @@
           <a:bodyPr/>
           <a:lstStyle/>
           <a:p>
-            <a:fld id="{1F5621B2-2E57-46C1-9A72-54B1B2278C0D}" type="slidenum">
+            <a:fld id="{335005BC-A67B-4D09-9A71-8B0F0FBF77AA}" type="slidenum">
               <a:rPr lang="en-US"/>
               <a:t>‹#›</a:t>
             </a:fld>
@@ -7260,7 +7260,7 @@
           <a:bodyPr/>
           <a:lstStyle/>
           <a:p>
-            <a:fld id="{C36EEF93-0EA7-496F-BE92-9600FB58B397}" type="slidenum">
+            <a:fld id="{B9042602-9980-49E2-9E8A-7CE75A6B5B82}" type="slidenum">
               <a:rPr lang="en-US"/>
               <a:t>‹#›</a:t>
             </a:fld>
